--- a/slides/pptx/week10.pptx
+++ b/slides/pptx/week10.pptx
@@ -2014,7 +2014,7 @@
     <p:bg>
       <p:bgPr>
         <a:solidFill>
-          <a:srgbClr val="0E1726"/>
+          <a:srgbClr val="FFFFFF"/>
         </a:solidFill>
       </p:bgPr>
     </p:bg>
@@ -2032,38 +2032,9 @@
           <a:chExt cx="0" cy="0"/>
         </a:xfrm>
       </p:grpSpPr>
-      <p:sp>
-        <p:nvSpPr>
-          <p:cNvPr id="2" name="Shape 0"/>
-          <p:cNvSpPr/>
-          <p:nvPr/>
-        </p:nvSpPr>
-        <p:spPr>
-          <a:xfrm>
-            <a:off x="603504" y="411480"/>
-            <a:ext cx="1874520" cy="932688"/>
-          </a:xfrm>
-          <a:prstGeom prst="roundRect">
-            <a:avLst>
-              <a:gd name="adj" fmla="val 7843"/>
-            </a:avLst>
-          </a:prstGeom>
-          <a:solidFill>
-            <a:srgbClr val="FFFFFF"/>
-          </a:solidFill>
-          <a:ln/>
-          <a:effectLst>
-            <a:outerShdw sx="100000" sy="100000" kx="0" ky="0" algn="bl" rotWithShape="0" blurRad="101600" dist="38100" dir="5400000">
-              <a:srgbClr val="000000">
-                <a:alpha val="35000"/>
-              </a:srgbClr>
-            </a:outerShdw>
-          </a:effectLst>
-        </p:spPr>
-      </p:sp>
       <p:pic>
         <p:nvPicPr>
-          <p:cNvPr id="3" name="Image 0" descr="/Users/pop7/Library/CloudStorage/OneDrive-MonsterConnectCo.,Ltd/Lecture/KOSEN69 - software-security/slides/pptx/assets/logo-small.png">    </p:cNvPr>
+          <p:cNvPr id="2" name="Image 0" descr="/Users/pop7/Library/CloudStorage/OneDrive-MonsterConnectCo.,Ltd/Lecture/KOSEN69 - software-security/slides/pptx/assets/logo-small.png">    </p:cNvPr>
           <p:cNvPicPr>
             <a:picLocks noChangeAspect="1"/>
           </p:cNvPicPr>
@@ -2077,8 +2048,8 @@
         </p:blipFill>
         <p:spPr>
           <a:xfrm>
-            <a:off x="758952" y="566928"/>
-            <a:ext cx="1563624" cy="621792"/>
+            <a:off x="640080" y="502920"/>
+            <a:ext cx="1691640" cy="676656"/>
           </a:xfrm>
           <a:prstGeom prst="rect">
             <a:avLst/>
@@ -2087,7 +2058,7 @@
       </p:pic>
       <p:sp>
         <p:nvSpPr>
-          <p:cNvPr id="4" name="Text 1"/>
+          <p:cNvPr id="3" name="Text 0"/>
           <p:cNvSpPr/>
           <p:nvPr/>
         </p:nvSpPr>
@@ -2126,7 +2097,7 @@
       </p:sp>
       <p:sp>
         <p:nvSpPr>
-          <p:cNvPr id="5" name="Text 2"/>
+          <p:cNvPr id="4" name="Text 1"/>
           <p:cNvSpPr/>
           <p:nvPr/>
         </p:nvSpPr>
@@ -2154,7 +2125,7 @@
             <a:r>
               <a:rPr lang="en-US" sz="4000" b="1" dirty="0">
                 <a:solidFill>
-                  <a:srgbClr val="E6EDF3"/>
+                  <a:srgbClr val="1F2937"/>
                 </a:solidFill>
                 <a:latin typeface="Arial" pitchFamily="34" charset="0"/>
                 <a:ea typeface="Arial" pitchFamily="34" charset="-122"/>
@@ -2168,7 +2139,7 @@
       </p:sp>
       <p:sp>
         <p:nvSpPr>
-          <p:cNvPr id="6" name="Text 3"/>
+          <p:cNvPr id="5" name="Text 2"/>
           <p:cNvSpPr/>
           <p:nvPr/>
         </p:nvSpPr>
@@ -2193,7 +2164,7 @@
             <a:r>
               <a:rPr lang="en-US" sz="1400" dirty="0">
                 <a:solidFill>
-                  <a:srgbClr val="94A3B8"/>
+                  <a:srgbClr val="64748B"/>
                 </a:solidFill>
                 <a:latin typeface="Calibri" pitchFamily="34" charset="0"/>
                 <a:ea typeface="Calibri" pitchFamily="34" charset="-122"/>
@@ -2219,7 +2190,7 @@
     <p:bg>
       <p:bgPr>
         <a:solidFill>
-          <a:srgbClr val="0E1726"/>
+          <a:srgbClr val="FFFFFF"/>
         </a:solidFill>
       </p:bgPr>
     </p:bg>
@@ -2256,9 +2227,9 @@
           </a:solidFill>
           <a:ln/>
           <a:effectLst>
-            <a:outerShdw sx="100000" sy="100000" kx="0" ky="0" algn="bl" rotWithShape="0" blurRad="101600" dist="38100" dir="5400000">
+            <a:outerShdw sx="100000" sy="100000" kx="0" ky="0" algn="bl" rotWithShape="0" blurRad="76200" dist="25400" dir="5400000">
               <a:srgbClr val="000000">
-                <a:alpha val="35000"/>
+                <a:alpha val="12000"/>
               </a:srgbClr>
             </a:outerShdw>
           </a:effectLst>
@@ -2315,7 +2286,7 @@
             <a:r>
               <a:rPr lang="en-US" sz="2600" b="1" dirty="0">
                 <a:solidFill>
-                  <a:srgbClr val="E6EDF3"/>
+                  <a:srgbClr val="1F2937"/>
                 </a:solidFill>
                 <a:latin typeface="Arial" pitchFamily="34" charset="0"/>
                 <a:ea typeface="Arial" pitchFamily="34" charset="-122"/>
@@ -2354,7 +2325,7 @@
             <a:r>
               <a:rPr lang="en-US" sz="1400" dirty="0">
                 <a:solidFill>
-                  <a:srgbClr val="E6EDF3"/>
+                  <a:srgbClr val="1F2937"/>
                 </a:solidFill>
                 <a:latin typeface="Calibri" pitchFamily="34" charset="0"/>
                 <a:ea typeface="Calibri" pitchFamily="34" charset="-122"/>
@@ -2387,7 +2358,7 @@
           </a:solidFill>
           <a:ln w="12700">
             <a:solidFill>
-              <a:srgbClr val="1E2B45"/>
+              <a:srgbClr val="E8EDF3"/>
             </a:solidFill>
             <a:prstDash val="solid"/>
           </a:ln>
@@ -2483,7 +2454,7 @@
             </a:avLst>
           </a:prstGeom>
           <a:solidFill>
-            <a:srgbClr val="1E2B45"/>
+            <a:srgbClr val="E8EDF3"/>
           </a:solidFill>
           <a:ln/>
         </p:spPr>
@@ -2554,7 +2525,7 @@
             <a:r>
               <a:rPr lang="en-US" sz="900" dirty="0">
                 <a:solidFill>
-                  <a:srgbClr val="94A3B8"/>
+                  <a:srgbClr val="64748B"/>
                 </a:solidFill>
                 <a:latin typeface="Calibri" pitchFamily="34" charset="0"/>
                 <a:ea typeface="Calibri" pitchFamily="34" charset="-122"/>
@@ -2566,38 +2537,9 @@
           </a:p>
         </p:txBody>
       </p:sp>
-      <p:sp>
-        <p:nvSpPr>
-          <p:cNvPr id="11" name="Shape 8"/>
-          <p:cNvSpPr/>
-          <p:nvPr/>
-        </p:nvSpPr>
-        <p:spPr>
-          <a:xfrm>
-            <a:off x="7772400" y="4590288"/>
-            <a:ext cx="969264" cy="475488"/>
-          </a:xfrm>
-          <a:prstGeom prst="roundRect">
-            <a:avLst>
-              <a:gd name="adj" fmla="val 11538"/>
-            </a:avLst>
-          </a:prstGeom>
-          <a:solidFill>
-            <a:srgbClr val="FFFFFF"/>
-          </a:solidFill>
-          <a:ln/>
-          <a:effectLst>
-            <a:outerShdw sx="100000" sy="100000" kx="0" ky="0" algn="bl" rotWithShape="0" blurRad="101600" dist="38100" dir="5400000">
-              <a:srgbClr val="000000">
-                <a:alpha val="35000"/>
-              </a:srgbClr>
-            </a:outerShdw>
-          </a:effectLst>
-        </p:spPr>
-      </p:sp>
       <p:pic>
         <p:nvPicPr>
-          <p:cNvPr id="12" name="Image 1" descr="/Users/pop7/Library/CloudStorage/OneDrive-MonsterConnectCo.,Ltd/Lecture/KOSEN69 - software-security/slides/pptx/assets/logo-small.png">    </p:cNvPr>
+          <p:cNvPr id="11" name="Image 1" descr="/Users/pop7/Library/CloudStorage/OneDrive-MonsterConnectCo.,Ltd/Lecture/KOSEN69 - software-security/slides/pptx/assets/logo-small.png">    </p:cNvPr>
           <p:cNvPicPr>
             <a:picLocks noChangeAspect="1"/>
           </p:cNvPicPr>
@@ -2611,7 +2553,7 @@
         </p:blipFill>
         <p:spPr>
           <a:xfrm>
-            <a:off x="7872984" y="4681728"/>
+            <a:off x="7882128" y="4700016"/>
             <a:ext cx="768096" cy="356616"/>
           </a:xfrm>
           <a:prstGeom prst="rect">
@@ -2633,7 +2575,7 @@
     <p:bg>
       <p:bgPr>
         <a:solidFill>
-          <a:srgbClr val="0E1726"/>
+          <a:srgbClr val="FFFFFF"/>
         </a:solidFill>
       </p:bgPr>
     </p:bg>
@@ -2670,9 +2612,9 @@
           </a:solidFill>
           <a:ln/>
           <a:effectLst>
-            <a:outerShdw sx="100000" sy="100000" kx="0" ky="0" algn="bl" rotWithShape="0" blurRad="101600" dist="38100" dir="5400000">
+            <a:outerShdw sx="100000" sy="100000" kx="0" ky="0" algn="bl" rotWithShape="0" blurRad="76200" dist="25400" dir="5400000">
               <a:srgbClr val="000000">
-                <a:alpha val="35000"/>
+                <a:alpha val="12000"/>
               </a:srgbClr>
             </a:outerShdw>
           </a:effectLst>
@@ -2729,7 +2671,7 @@
             <a:r>
               <a:rPr lang="en-US" sz="2600" b="1" dirty="0">
                 <a:solidFill>
-                  <a:srgbClr val="E6EDF3"/>
+                  <a:srgbClr val="1F2937"/>
                 </a:solidFill>
                 <a:latin typeface="Arial" pitchFamily="34" charset="0"/>
                 <a:ea typeface="Arial" pitchFamily="34" charset="-122"/>
@@ -2762,7 +2704,7 @@
           </a:solidFill>
           <a:ln w="12700">
             <a:solidFill>
-              <a:srgbClr val="1E2B45"/>
+              <a:srgbClr val="E8EDF3"/>
             </a:solidFill>
             <a:prstDash val="solid"/>
           </a:ln>
@@ -2910,7 +2852,7 @@
             <a:r>
               <a:rPr lang="en-US" sz="1350" dirty="0">
                 <a:solidFill>
-                  <a:srgbClr val="E6EDF3"/>
+                  <a:srgbClr val="1F2937"/>
                 </a:solidFill>
                 <a:latin typeface="Calibri" pitchFamily="34" charset="0"/>
                 <a:ea typeface="Calibri" pitchFamily="34" charset="-122"/>
@@ -3008,7 +2950,7 @@
             <a:r>
               <a:rPr lang="en-US" sz="1350" dirty="0">
                 <a:solidFill>
-                  <a:srgbClr val="E6EDF3"/>
+                  <a:srgbClr val="1F2937"/>
                 </a:solidFill>
                 <a:latin typeface="Calibri" pitchFamily="34" charset="0"/>
                 <a:ea typeface="Calibri" pitchFamily="34" charset="-122"/>
@@ -3106,7 +3048,7 @@
             <a:r>
               <a:rPr lang="en-US" sz="1350" dirty="0">
                 <a:solidFill>
-                  <a:srgbClr val="E6EDF3"/>
+                  <a:srgbClr val="1F2937"/>
                 </a:solidFill>
                 <a:latin typeface="Calibri" pitchFamily="34" charset="0"/>
                 <a:ea typeface="Calibri" pitchFamily="34" charset="-122"/>
@@ -3204,7 +3146,7 @@
             <a:r>
               <a:rPr lang="en-US" sz="1350" dirty="0">
                 <a:solidFill>
-                  <a:srgbClr val="E6EDF3"/>
+                  <a:srgbClr val="1F2937"/>
                 </a:solidFill>
                 <a:latin typeface="Calibri" pitchFamily="34" charset="0"/>
                 <a:ea typeface="Calibri" pitchFamily="34" charset="-122"/>
@@ -3243,7 +3185,7 @@
             <a:r>
               <a:rPr lang="en-US" sz="900" dirty="0">
                 <a:solidFill>
-                  <a:srgbClr val="94A3B8"/>
+                  <a:srgbClr val="64748B"/>
                 </a:solidFill>
                 <a:latin typeface="Calibri" pitchFamily="34" charset="0"/>
                 <a:ea typeface="Calibri" pitchFamily="34" charset="-122"/>
@@ -3255,38 +3197,9 @@
           </a:p>
         </p:txBody>
       </p:sp>
-      <p:sp>
-        <p:nvSpPr>
-          <p:cNvPr id="20" name="Shape 17"/>
-          <p:cNvSpPr/>
-          <p:nvPr/>
-        </p:nvSpPr>
-        <p:spPr>
-          <a:xfrm>
-            <a:off x="7772400" y="4590288"/>
-            <a:ext cx="969264" cy="475488"/>
-          </a:xfrm>
-          <a:prstGeom prst="roundRect">
-            <a:avLst>
-              <a:gd name="adj" fmla="val 11538"/>
-            </a:avLst>
-          </a:prstGeom>
-          <a:solidFill>
-            <a:srgbClr val="FFFFFF"/>
-          </a:solidFill>
-          <a:ln/>
-          <a:effectLst>
-            <a:outerShdw sx="100000" sy="100000" kx="0" ky="0" algn="bl" rotWithShape="0" blurRad="101600" dist="38100" dir="5400000">
-              <a:srgbClr val="000000">
-                <a:alpha val="35000"/>
-              </a:srgbClr>
-            </a:outerShdw>
-          </a:effectLst>
-        </p:spPr>
-      </p:sp>
       <p:pic>
         <p:nvPicPr>
-          <p:cNvPr id="21" name="Image 1" descr="/Users/pop7/Library/CloudStorage/OneDrive-MonsterConnectCo.,Ltd/Lecture/KOSEN69 - software-security/slides/pptx/assets/logo-small.png">    </p:cNvPr>
+          <p:cNvPr id="20" name="Image 1" descr="/Users/pop7/Library/CloudStorage/OneDrive-MonsterConnectCo.,Ltd/Lecture/KOSEN69 - software-security/slides/pptx/assets/logo-small.png">    </p:cNvPr>
           <p:cNvPicPr>
             <a:picLocks noChangeAspect="1"/>
           </p:cNvPicPr>
@@ -3300,7 +3213,7 @@
         </p:blipFill>
         <p:spPr>
           <a:xfrm>
-            <a:off x="7872984" y="4681728"/>
+            <a:off x="7882128" y="4700016"/>
             <a:ext cx="768096" cy="356616"/>
           </a:xfrm>
           <a:prstGeom prst="rect">
@@ -3322,7 +3235,7 @@
     <p:bg>
       <p:bgPr>
         <a:solidFill>
-          <a:srgbClr val="0E1726"/>
+          <a:srgbClr val="FFFFFF"/>
         </a:solidFill>
       </p:bgPr>
     </p:bg>
@@ -3359,9 +3272,9 @@
           </a:solidFill>
           <a:ln/>
           <a:effectLst>
-            <a:outerShdw sx="100000" sy="100000" kx="0" ky="0" algn="bl" rotWithShape="0" blurRad="101600" dist="38100" dir="5400000">
+            <a:outerShdw sx="100000" sy="100000" kx="0" ky="0" algn="bl" rotWithShape="0" blurRad="76200" dist="25400" dir="5400000">
               <a:srgbClr val="000000">
-                <a:alpha val="35000"/>
+                <a:alpha val="12000"/>
               </a:srgbClr>
             </a:outerShdw>
           </a:effectLst>
@@ -3418,7 +3331,7 @@
             <a:r>
               <a:rPr lang="en-US" sz="2600" b="1" dirty="0">
                 <a:solidFill>
-                  <a:srgbClr val="E6EDF3"/>
+                  <a:srgbClr val="1F2937"/>
                 </a:solidFill>
                 <a:latin typeface="Arial" pitchFamily="34" charset="0"/>
                 <a:ea typeface="Arial" pitchFamily="34" charset="-122"/>
@@ -3447,13 +3360,13 @@
             </a:avLst>
           </a:prstGeom>
           <a:solidFill>
-            <a:srgbClr val="18243A"/>
+            <a:srgbClr val="F1F5F9"/>
           </a:solidFill>
           <a:ln/>
           <a:effectLst>
-            <a:outerShdw sx="100000" sy="100000" kx="0" ky="0" algn="bl" rotWithShape="0" blurRad="101600" dist="38100" dir="5400000">
+            <a:outerShdw sx="100000" sy="100000" kx="0" ky="0" algn="bl" rotWithShape="0" blurRad="76200" dist="25400" dir="5400000">
               <a:srgbClr val="000000">
-                <a:alpha val="35000"/>
+                <a:alpha val="12000"/>
               </a:srgbClr>
             </a:outerShdw>
           </a:effectLst>
@@ -3490,7 +3403,7 @@
             <a:r>
               <a:rPr lang="en-US" sz="1400" dirty="0">
                 <a:solidFill>
-                  <a:srgbClr val="E6EDF3"/>
+                  <a:srgbClr val="1F2937"/>
                 </a:solidFill>
                 <a:latin typeface="Calibri" pitchFamily="34" charset="0"/>
                 <a:ea typeface="Calibri" pitchFamily="34" charset="-122"/>
@@ -3511,7 +3424,7 @@
             <a:r>
               <a:rPr lang="en-US" sz="1400" dirty="0">
                 <a:solidFill>
-                  <a:srgbClr val="E6EDF3"/>
+                  <a:srgbClr val="1F2937"/>
                 </a:solidFill>
                 <a:latin typeface="Calibri" pitchFamily="34" charset="0"/>
                 <a:ea typeface="Calibri" pitchFamily="34" charset="-122"/>
@@ -3532,7 +3445,7 @@
             <a:r>
               <a:rPr lang="en-US" sz="1400" dirty="0">
                 <a:solidFill>
-                  <a:srgbClr val="E6EDF3"/>
+                  <a:srgbClr val="1F2937"/>
                 </a:solidFill>
                 <a:latin typeface="Calibri" pitchFamily="34" charset="0"/>
                 <a:ea typeface="Calibri" pitchFamily="34" charset="-122"/>
@@ -3571,7 +3484,7 @@
             <a:r>
               <a:rPr lang="en-US" sz="900" dirty="0">
                 <a:solidFill>
-                  <a:srgbClr val="94A3B8"/>
+                  <a:srgbClr val="64748B"/>
                 </a:solidFill>
                 <a:latin typeface="Calibri" pitchFamily="34" charset="0"/>
                 <a:ea typeface="Calibri" pitchFamily="34" charset="-122"/>
@@ -3583,38 +3496,9 @@
           </a:p>
         </p:txBody>
       </p:sp>
-      <p:sp>
-        <p:nvSpPr>
-          <p:cNvPr id="8" name="Shape 5"/>
-          <p:cNvSpPr/>
-          <p:nvPr/>
-        </p:nvSpPr>
-        <p:spPr>
-          <a:xfrm>
-            <a:off x="7772400" y="4590288"/>
-            <a:ext cx="969264" cy="475488"/>
-          </a:xfrm>
-          <a:prstGeom prst="roundRect">
-            <a:avLst>
-              <a:gd name="adj" fmla="val 11538"/>
-            </a:avLst>
-          </a:prstGeom>
-          <a:solidFill>
-            <a:srgbClr val="FFFFFF"/>
-          </a:solidFill>
-          <a:ln/>
-          <a:effectLst>
-            <a:outerShdw sx="100000" sy="100000" kx="0" ky="0" algn="bl" rotWithShape="0" blurRad="101600" dist="38100" dir="5400000">
-              <a:srgbClr val="000000">
-                <a:alpha val="35000"/>
-              </a:srgbClr>
-            </a:outerShdw>
-          </a:effectLst>
-        </p:spPr>
-      </p:sp>
       <p:pic>
         <p:nvPicPr>
-          <p:cNvPr id="9" name="Image 1" descr="/Users/pop7/Library/CloudStorage/OneDrive-MonsterConnectCo.,Ltd/Lecture/KOSEN69 - software-security/slides/pptx/assets/logo-small.png">    </p:cNvPr>
+          <p:cNvPr id="8" name="Image 1" descr="/Users/pop7/Library/CloudStorage/OneDrive-MonsterConnectCo.,Ltd/Lecture/KOSEN69 - software-security/slides/pptx/assets/logo-small.png">    </p:cNvPr>
           <p:cNvPicPr>
             <a:picLocks noChangeAspect="1"/>
           </p:cNvPicPr>
@@ -3628,7 +3512,7 @@
         </p:blipFill>
         <p:spPr>
           <a:xfrm>
-            <a:off x="7872984" y="4681728"/>
+            <a:off x="7882128" y="4700016"/>
             <a:ext cx="768096" cy="356616"/>
           </a:xfrm>
           <a:prstGeom prst="rect">
@@ -3650,7 +3534,7 @@
     <p:bg>
       <p:bgPr>
         <a:solidFill>
-          <a:srgbClr val="0E1726"/>
+          <a:srgbClr val="FFFFFF"/>
         </a:solidFill>
       </p:bgPr>
     </p:bg>
@@ -3687,9 +3571,9 @@
           </a:solidFill>
           <a:ln/>
           <a:effectLst>
-            <a:outerShdw sx="100000" sy="100000" kx="0" ky="0" algn="bl" rotWithShape="0" blurRad="101600" dist="38100" dir="5400000">
+            <a:outerShdw sx="100000" sy="100000" kx="0" ky="0" algn="bl" rotWithShape="0" blurRad="76200" dist="25400" dir="5400000">
               <a:srgbClr val="000000">
-                <a:alpha val="35000"/>
+                <a:alpha val="12000"/>
               </a:srgbClr>
             </a:outerShdw>
           </a:effectLst>
@@ -3746,7 +3630,7 @@
             <a:r>
               <a:rPr lang="en-US" sz="2600" b="1" dirty="0">
                 <a:solidFill>
-                  <a:srgbClr val="E6EDF3"/>
+                  <a:srgbClr val="1F2937"/>
                 </a:solidFill>
                 <a:latin typeface="Arial" pitchFamily="34" charset="0"/>
                 <a:ea typeface="Arial" pitchFamily="34" charset="-122"/>
@@ -3775,13 +3659,13 @@
             </a:avLst>
           </a:prstGeom>
           <a:solidFill>
-            <a:srgbClr val="18243A"/>
+            <a:srgbClr val="F1F5F9"/>
           </a:solidFill>
           <a:ln/>
           <a:effectLst>
-            <a:outerShdw sx="100000" sy="100000" kx="0" ky="0" algn="bl" rotWithShape="0" blurRad="101600" dist="38100" dir="5400000">
+            <a:outerShdw sx="100000" sy="100000" kx="0" ky="0" algn="bl" rotWithShape="0" blurRad="76200" dist="25400" dir="5400000">
               <a:srgbClr val="000000">
-                <a:alpha val="35000"/>
+                <a:alpha val="12000"/>
               </a:srgbClr>
             </a:outerShdw>
           </a:effectLst>
@@ -3818,7 +3702,7 @@
             <a:r>
               <a:rPr lang="en-US" sz="1400" dirty="0">
                 <a:solidFill>
-                  <a:srgbClr val="E6EDF3"/>
+                  <a:srgbClr val="1F2937"/>
                 </a:solidFill>
                 <a:latin typeface="Calibri" pitchFamily="34" charset="0"/>
                 <a:ea typeface="Calibri" pitchFamily="34" charset="-122"/>
@@ -3839,7 +3723,7 @@
             <a:r>
               <a:rPr lang="en-US" sz="1400" dirty="0">
                 <a:solidFill>
-                  <a:srgbClr val="E6EDF3"/>
+                  <a:srgbClr val="1F2937"/>
                 </a:solidFill>
                 <a:latin typeface="Calibri" pitchFamily="34" charset="0"/>
                 <a:ea typeface="Calibri" pitchFamily="34" charset="-122"/>
@@ -3860,7 +3744,7 @@
             <a:r>
               <a:rPr lang="en-US" sz="1400" dirty="0">
                 <a:solidFill>
-                  <a:srgbClr val="E6EDF3"/>
+                  <a:srgbClr val="1F2937"/>
                 </a:solidFill>
                 <a:latin typeface="Calibri" pitchFamily="34" charset="0"/>
                 <a:ea typeface="Calibri" pitchFamily="34" charset="-122"/>
@@ -3899,7 +3783,7 @@
             <a:r>
               <a:rPr lang="en-US" sz="900" dirty="0">
                 <a:solidFill>
-                  <a:srgbClr val="94A3B8"/>
+                  <a:srgbClr val="64748B"/>
                 </a:solidFill>
                 <a:latin typeface="Calibri" pitchFamily="34" charset="0"/>
                 <a:ea typeface="Calibri" pitchFamily="34" charset="-122"/>
@@ -3911,38 +3795,9 @@
           </a:p>
         </p:txBody>
       </p:sp>
-      <p:sp>
-        <p:nvSpPr>
-          <p:cNvPr id="8" name="Shape 5"/>
-          <p:cNvSpPr/>
-          <p:nvPr/>
-        </p:nvSpPr>
-        <p:spPr>
-          <a:xfrm>
-            <a:off x="7772400" y="4590288"/>
-            <a:ext cx="969264" cy="475488"/>
-          </a:xfrm>
-          <a:prstGeom prst="roundRect">
-            <a:avLst>
-              <a:gd name="adj" fmla="val 11538"/>
-            </a:avLst>
-          </a:prstGeom>
-          <a:solidFill>
-            <a:srgbClr val="FFFFFF"/>
-          </a:solidFill>
-          <a:ln/>
-          <a:effectLst>
-            <a:outerShdw sx="100000" sy="100000" kx="0" ky="0" algn="bl" rotWithShape="0" blurRad="101600" dist="38100" dir="5400000">
-              <a:srgbClr val="000000">
-                <a:alpha val="35000"/>
-              </a:srgbClr>
-            </a:outerShdw>
-          </a:effectLst>
-        </p:spPr>
-      </p:sp>
       <p:pic>
         <p:nvPicPr>
-          <p:cNvPr id="9" name="Image 1" descr="/Users/pop7/Library/CloudStorage/OneDrive-MonsterConnectCo.,Ltd/Lecture/KOSEN69 - software-security/slides/pptx/assets/logo-small.png">    </p:cNvPr>
+          <p:cNvPr id="8" name="Image 1" descr="/Users/pop7/Library/CloudStorage/OneDrive-MonsterConnectCo.,Ltd/Lecture/KOSEN69 - software-security/slides/pptx/assets/logo-small.png">    </p:cNvPr>
           <p:cNvPicPr>
             <a:picLocks noChangeAspect="1"/>
           </p:cNvPicPr>
@@ -3956,7 +3811,7 @@
         </p:blipFill>
         <p:spPr>
           <a:xfrm>
-            <a:off x="7872984" y="4681728"/>
+            <a:off x="7882128" y="4700016"/>
             <a:ext cx="768096" cy="356616"/>
           </a:xfrm>
           <a:prstGeom prst="rect">
@@ -3978,7 +3833,7 @@
     <p:bg>
       <p:bgPr>
         <a:solidFill>
-          <a:srgbClr val="0E1726"/>
+          <a:srgbClr val="FFFFFF"/>
         </a:solidFill>
       </p:bgPr>
     </p:bg>
@@ -4023,7 +3878,7 @@
             <a:r>
               <a:rPr lang="en-US" sz="4600" b="1" dirty="0">
                 <a:solidFill>
-                  <a:srgbClr val="E6EDF3"/>
+                  <a:srgbClr val="1F2937"/>
                 </a:solidFill>
                 <a:latin typeface="Arial" pitchFamily="34" charset="0"/>
                 <a:ea typeface="Arial" pitchFamily="34" charset="-122"/>
@@ -4074,38 +3929,9 @@
           </a:p>
         </p:txBody>
       </p:sp>
-      <p:sp>
-        <p:nvSpPr>
-          <p:cNvPr id="4" name="Shape 2"/>
-          <p:cNvSpPr/>
-          <p:nvPr/>
-        </p:nvSpPr>
-        <p:spPr>
-          <a:xfrm>
-            <a:off x="7772400" y="4590288"/>
-            <a:ext cx="969264" cy="475488"/>
-          </a:xfrm>
-          <a:prstGeom prst="roundRect">
-            <a:avLst>
-              <a:gd name="adj" fmla="val 11538"/>
-            </a:avLst>
-          </a:prstGeom>
-          <a:solidFill>
-            <a:srgbClr val="FFFFFF"/>
-          </a:solidFill>
-          <a:ln/>
-          <a:effectLst>
-            <a:outerShdw sx="100000" sy="100000" kx="0" ky="0" algn="bl" rotWithShape="0" blurRad="101600" dist="38100" dir="5400000">
-              <a:srgbClr val="000000">
-                <a:alpha val="35000"/>
-              </a:srgbClr>
-            </a:outerShdw>
-          </a:effectLst>
-        </p:spPr>
-      </p:sp>
       <p:pic>
         <p:nvPicPr>
-          <p:cNvPr id="5" name="Image 0" descr="/Users/pop7/Library/CloudStorage/OneDrive-MonsterConnectCo.,Ltd/Lecture/KOSEN69 - software-security/slides/pptx/assets/logo-small.png">    </p:cNvPr>
+          <p:cNvPr id="4" name="Image 0" descr="/Users/pop7/Library/CloudStorage/OneDrive-MonsterConnectCo.,Ltd/Lecture/KOSEN69 - software-security/slides/pptx/assets/logo-small.png">    </p:cNvPr>
           <p:cNvPicPr>
             <a:picLocks noChangeAspect="1"/>
           </p:cNvPicPr>
@@ -4119,7 +3945,7 @@
         </p:blipFill>
         <p:spPr>
           <a:xfrm>
-            <a:off x="7872984" y="4681728"/>
+            <a:off x="7882128" y="4700016"/>
             <a:ext cx="768096" cy="356616"/>
           </a:xfrm>
           <a:prstGeom prst="rect">
@@ -4141,7 +3967,7 @@
     <p:bg>
       <p:bgPr>
         <a:solidFill>
-          <a:srgbClr val="0E1726"/>
+          <a:srgbClr val="FFFFFF"/>
         </a:solidFill>
       </p:bgPr>
     </p:bg>
@@ -4178,9 +4004,9 @@
           </a:solidFill>
           <a:ln/>
           <a:effectLst>
-            <a:outerShdw sx="100000" sy="100000" kx="0" ky="0" algn="bl" rotWithShape="0" blurRad="101600" dist="38100" dir="5400000">
+            <a:outerShdw sx="100000" sy="100000" kx="0" ky="0" algn="bl" rotWithShape="0" blurRad="76200" dist="25400" dir="5400000">
               <a:srgbClr val="000000">
-                <a:alpha val="35000"/>
+                <a:alpha val="12000"/>
               </a:srgbClr>
             </a:outerShdw>
           </a:effectLst>
@@ -4237,7 +4063,7 @@
             <a:r>
               <a:rPr lang="en-US" sz="2600" b="1" dirty="0">
                 <a:solidFill>
-                  <a:srgbClr val="E6EDF3"/>
+                  <a:srgbClr val="1F2937"/>
                 </a:solidFill>
                 <a:latin typeface="Arial" pitchFamily="34" charset="0"/>
                 <a:ea typeface="Arial" pitchFamily="34" charset="-122"/>
@@ -4266,13 +4092,13 @@
             </a:avLst>
           </a:prstGeom>
           <a:solidFill>
-            <a:srgbClr val="18243A"/>
+            <a:srgbClr val="F1F5F9"/>
           </a:solidFill>
           <a:ln/>
           <a:effectLst>
-            <a:outerShdw sx="100000" sy="100000" kx="0" ky="0" algn="bl" rotWithShape="0" blurRad="101600" dist="38100" dir="5400000">
+            <a:outerShdw sx="100000" sy="100000" kx="0" ky="0" algn="bl" rotWithShape="0" blurRad="76200" dist="25400" dir="5400000">
               <a:srgbClr val="000000">
-                <a:alpha val="35000"/>
+                <a:alpha val="12000"/>
               </a:srgbClr>
             </a:outerShdw>
           </a:effectLst>
@@ -4309,7 +4135,7 @@
             <a:r>
               <a:rPr lang="en-US" sz="1400" dirty="0">
                 <a:solidFill>
-                  <a:srgbClr val="E6EDF3"/>
+                  <a:srgbClr val="1F2937"/>
                 </a:solidFill>
                 <a:latin typeface="Calibri" pitchFamily="34" charset="0"/>
                 <a:ea typeface="Calibri" pitchFamily="34" charset="-122"/>
@@ -4330,7 +4156,7 @@
             <a:r>
               <a:rPr lang="en-US" sz="1400" dirty="0">
                 <a:solidFill>
-                  <a:srgbClr val="E6EDF3"/>
+                  <a:srgbClr val="1F2937"/>
                 </a:solidFill>
                 <a:latin typeface="Calibri" pitchFamily="34" charset="0"/>
                 <a:ea typeface="Calibri" pitchFamily="34" charset="-122"/>
@@ -4351,7 +4177,7 @@
             <a:r>
               <a:rPr lang="en-US" sz="1400" dirty="0">
                 <a:solidFill>
-                  <a:srgbClr val="E6EDF3"/>
+                  <a:srgbClr val="1F2937"/>
                 </a:solidFill>
                 <a:latin typeface="Calibri" pitchFamily="34" charset="0"/>
                 <a:ea typeface="Calibri" pitchFamily="34" charset="-122"/>
@@ -4372,7 +4198,7 @@
             <a:r>
               <a:rPr lang="en-US" sz="1400" dirty="0">
                 <a:solidFill>
-                  <a:srgbClr val="E6EDF3"/>
+                  <a:srgbClr val="1F2937"/>
                 </a:solidFill>
                 <a:latin typeface="Calibri" pitchFamily="34" charset="0"/>
                 <a:ea typeface="Calibri" pitchFamily="34" charset="-122"/>
@@ -4393,7 +4219,7 @@
             <a:r>
               <a:rPr lang="en-US" sz="1400" dirty="0">
                 <a:solidFill>
-                  <a:srgbClr val="E6EDF3"/>
+                  <a:srgbClr val="1F2937"/>
                 </a:solidFill>
                 <a:latin typeface="Calibri" pitchFamily="34" charset="0"/>
                 <a:ea typeface="Calibri" pitchFamily="34" charset="-122"/>
@@ -4432,7 +4258,7 @@
             <a:r>
               <a:rPr lang="en-US" sz="900" dirty="0">
                 <a:solidFill>
-                  <a:srgbClr val="94A3B8"/>
+                  <a:srgbClr val="64748B"/>
                 </a:solidFill>
                 <a:latin typeface="Calibri" pitchFamily="34" charset="0"/>
                 <a:ea typeface="Calibri" pitchFamily="34" charset="-122"/>
@@ -4444,38 +4270,9 @@
           </a:p>
         </p:txBody>
       </p:sp>
-      <p:sp>
-        <p:nvSpPr>
-          <p:cNvPr id="8" name="Shape 5"/>
-          <p:cNvSpPr/>
-          <p:nvPr/>
-        </p:nvSpPr>
-        <p:spPr>
-          <a:xfrm>
-            <a:off x="7772400" y="4590288"/>
-            <a:ext cx="969264" cy="475488"/>
-          </a:xfrm>
-          <a:prstGeom prst="roundRect">
-            <a:avLst>
-              <a:gd name="adj" fmla="val 11538"/>
-            </a:avLst>
-          </a:prstGeom>
-          <a:solidFill>
-            <a:srgbClr val="FFFFFF"/>
-          </a:solidFill>
-          <a:ln/>
-          <a:effectLst>
-            <a:outerShdw sx="100000" sy="100000" kx="0" ky="0" algn="bl" rotWithShape="0" blurRad="101600" dist="38100" dir="5400000">
-              <a:srgbClr val="000000">
-                <a:alpha val="35000"/>
-              </a:srgbClr>
-            </a:outerShdw>
-          </a:effectLst>
-        </p:spPr>
-      </p:sp>
       <p:pic>
         <p:nvPicPr>
-          <p:cNvPr id="9" name="Image 1" descr="/Users/pop7/Library/CloudStorage/OneDrive-MonsterConnectCo.,Ltd/Lecture/KOSEN69 - software-security/slides/pptx/assets/logo-small.png">    </p:cNvPr>
+          <p:cNvPr id="8" name="Image 1" descr="/Users/pop7/Library/CloudStorage/OneDrive-MonsterConnectCo.,Ltd/Lecture/KOSEN69 - software-security/slides/pptx/assets/logo-small.png">    </p:cNvPr>
           <p:cNvPicPr>
             <a:picLocks noChangeAspect="1"/>
           </p:cNvPicPr>
@@ -4489,7 +4286,7 @@
         </p:blipFill>
         <p:spPr>
           <a:xfrm>
-            <a:off x="7872984" y="4681728"/>
+            <a:off x="7882128" y="4700016"/>
             <a:ext cx="768096" cy="356616"/>
           </a:xfrm>
           <a:prstGeom prst="rect">
@@ -4511,7 +4308,7 @@
     <p:bg>
       <p:bgPr>
         <a:solidFill>
-          <a:srgbClr val="0E1726"/>
+          <a:srgbClr val="FFFFFF"/>
         </a:solidFill>
       </p:bgPr>
     </p:bg>
@@ -4548,9 +4345,9 @@
           </a:solidFill>
           <a:ln/>
           <a:effectLst>
-            <a:outerShdw sx="100000" sy="100000" kx="0" ky="0" algn="bl" rotWithShape="0" blurRad="101600" dist="38100" dir="5400000">
+            <a:outerShdw sx="100000" sy="100000" kx="0" ky="0" algn="bl" rotWithShape="0" blurRad="76200" dist="25400" dir="5400000">
               <a:srgbClr val="000000">
-                <a:alpha val="35000"/>
+                <a:alpha val="12000"/>
               </a:srgbClr>
             </a:outerShdw>
           </a:effectLst>
@@ -4607,7 +4404,7 @@
             <a:r>
               <a:rPr lang="en-US" sz="2600" b="1" dirty="0">
                 <a:solidFill>
-                  <a:srgbClr val="E6EDF3"/>
+                  <a:srgbClr val="1F2937"/>
                 </a:solidFill>
                 <a:latin typeface="Arial" pitchFamily="34" charset="0"/>
                 <a:ea typeface="Arial" pitchFamily="34" charset="-122"/>
@@ -4636,13 +4433,13 @@
             </a:avLst>
           </a:prstGeom>
           <a:solidFill>
-            <a:srgbClr val="18243A"/>
+            <a:srgbClr val="F1F5F9"/>
           </a:solidFill>
           <a:ln/>
           <a:effectLst>
-            <a:outerShdw sx="100000" sy="100000" kx="0" ky="0" algn="bl" rotWithShape="0" blurRad="101600" dist="38100" dir="5400000">
+            <a:outerShdw sx="100000" sy="100000" kx="0" ky="0" algn="bl" rotWithShape="0" blurRad="76200" dist="25400" dir="5400000">
               <a:srgbClr val="000000">
-                <a:alpha val="35000"/>
+                <a:alpha val="12000"/>
               </a:srgbClr>
             </a:outerShdw>
           </a:effectLst>
@@ -4679,7 +4476,7 @@
             <a:r>
               <a:rPr lang="en-US" sz="1400" dirty="0">
                 <a:solidFill>
-                  <a:srgbClr val="E6EDF3"/>
+                  <a:srgbClr val="1F2937"/>
                 </a:solidFill>
                 <a:latin typeface="Calibri" pitchFamily="34" charset="0"/>
                 <a:ea typeface="Calibri" pitchFamily="34" charset="-122"/>
@@ -4700,7 +4497,7 @@
             <a:r>
               <a:rPr lang="en-US" sz="1400" dirty="0">
                 <a:solidFill>
-                  <a:srgbClr val="E6EDF3"/>
+                  <a:srgbClr val="1F2937"/>
                 </a:solidFill>
                 <a:latin typeface="Calibri" pitchFamily="34" charset="0"/>
                 <a:ea typeface="Calibri" pitchFamily="34" charset="-122"/>
@@ -4739,7 +4536,7 @@
             <a:r>
               <a:rPr lang="en-US" sz="900" dirty="0">
                 <a:solidFill>
-                  <a:srgbClr val="94A3B8"/>
+                  <a:srgbClr val="64748B"/>
                 </a:solidFill>
                 <a:latin typeface="Calibri" pitchFamily="34" charset="0"/>
                 <a:ea typeface="Calibri" pitchFamily="34" charset="-122"/>
@@ -4751,38 +4548,9 @@
           </a:p>
         </p:txBody>
       </p:sp>
-      <p:sp>
-        <p:nvSpPr>
-          <p:cNvPr id="8" name="Shape 5"/>
-          <p:cNvSpPr/>
-          <p:nvPr/>
-        </p:nvSpPr>
-        <p:spPr>
-          <a:xfrm>
-            <a:off x="7772400" y="4590288"/>
-            <a:ext cx="969264" cy="475488"/>
-          </a:xfrm>
-          <a:prstGeom prst="roundRect">
-            <a:avLst>
-              <a:gd name="adj" fmla="val 11538"/>
-            </a:avLst>
-          </a:prstGeom>
-          <a:solidFill>
-            <a:srgbClr val="FFFFFF"/>
-          </a:solidFill>
-          <a:ln/>
-          <a:effectLst>
-            <a:outerShdw sx="100000" sy="100000" kx="0" ky="0" algn="bl" rotWithShape="0" blurRad="101600" dist="38100" dir="5400000">
-              <a:srgbClr val="000000">
-                <a:alpha val="35000"/>
-              </a:srgbClr>
-            </a:outerShdw>
-          </a:effectLst>
-        </p:spPr>
-      </p:sp>
       <p:pic>
         <p:nvPicPr>
-          <p:cNvPr id="9" name="Image 1" descr="/Users/pop7/Library/CloudStorage/OneDrive-MonsterConnectCo.,Ltd/Lecture/KOSEN69 - software-security/slides/pptx/assets/logo-small.png">    </p:cNvPr>
+          <p:cNvPr id="8" name="Image 1" descr="/Users/pop7/Library/CloudStorage/OneDrive-MonsterConnectCo.,Ltd/Lecture/KOSEN69 - software-security/slides/pptx/assets/logo-small.png">    </p:cNvPr>
           <p:cNvPicPr>
             <a:picLocks noChangeAspect="1"/>
           </p:cNvPicPr>
@@ -4796,7 +4564,7 @@
         </p:blipFill>
         <p:spPr>
           <a:xfrm>
-            <a:off x="7872984" y="4681728"/>
+            <a:off x="7882128" y="4700016"/>
             <a:ext cx="768096" cy="356616"/>
           </a:xfrm>
           <a:prstGeom prst="rect">
@@ -4818,7 +4586,7 @@
     <p:bg>
       <p:bgPr>
         <a:solidFill>
-          <a:srgbClr val="0E1726"/>
+          <a:srgbClr val="FFFFFF"/>
         </a:solidFill>
       </p:bgPr>
     </p:bg>
@@ -4855,9 +4623,9 @@
           </a:solidFill>
           <a:ln/>
           <a:effectLst>
-            <a:outerShdw sx="100000" sy="100000" kx="0" ky="0" algn="bl" rotWithShape="0" blurRad="101600" dist="38100" dir="5400000">
+            <a:outerShdw sx="100000" sy="100000" kx="0" ky="0" algn="bl" rotWithShape="0" blurRad="76200" dist="25400" dir="5400000">
               <a:srgbClr val="000000">
-                <a:alpha val="35000"/>
+                <a:alpha val="12000"/>
               </a:srgbClr>
             </a:outerShdw>
           </a:effectLst>
@@ -4914,7 +4682,7 @@
             <a:r>
               <a:rPr lang="en-US" sz="2600" b="1" dirty="0">
                 <a:solidFill>
-                  <a:srgbClr val="E6EDF3"/>
+                  <a:srgbClr val="1F2937"/>
                 </a:solidFill>
                 <a:latin typeface="Arial" pitchFamily="34" charset="0"/>
                 <a:ea typeface="Arial" pitchFamily="34" charset="-122"/>
@@ -4943,13 +4711,13 @@
             </a:avLst>
           </a:prstGeom>
           <a:solidFill>
-            <a:srgbClr val="18243A"/>
+            <a:srgbClr val="F1F5F9"/>
           </a:solidFill>
           <a:ln/>
           <a:effectLst>
-            <a:outerShdw sx="100000" sy="100000" kx="0" ky="0" algn="bl" rotWithShape="0" blurRad="101600" dist="38100" dir="5400000">
+            <a:outerShdw sx="100000" sy="100000" kx="0" ky="0" algn="bl" rotWithShape="0" blurRad="76200" dist="25400" dir="5400000">
               <a:srgbClr val="000000">
-                <a:alpha val="35000"/>
+                <a:alpha val="12000"/>
               </a:srgbClr>
             </a:outerShdw>
           </a:effectLst>
@@ -4986,7 +4754,7 @@
             <a:r>
               <a:rPr lang="en-US" sz="1400" dirty="0">
                 <a:solidFill>
-                  <a:srgbClr val="E6EDF3"/>
+                  <a:srgbClr val="1F2937"/>
                 </a:solidFill>
                 <a:latin typeface="Calibri" pitchFamily="34" charset="0"/>
                 <a:ea typeface="Calibri" pitchFamily="34" charset="-122"/>
@@ -5007,7 +4775,7 @@
             <a:r>
               <a:rPr lang="en-US" sz="1400" dirty="0">
                 <a:solidFill>
-                  <a:srgbClr val="E6EDF3"/>
+                  <a:srgbClr val="1F2937"/>
                 </a:solidFill>
                 <a:latin typeface="Calibri" pitchFamily="34" charset="0"/>
                 <a:ea typeface="Calibri" pitchFamily="34" charset="-122"/>
@@ -5028,7 +4796,7 @@
             <a:r>
               <a:rPr lang="en-US" sz="1400" dirty="0">
                 <a:solidFill>
-                  <a:srgbClr val="E6EDF3"/>
+                  <a:srgbClr val="1F2937"/>
                 </a:solidFill>
                 <a:latin typeface="Calibri" pitchFamily="34" charset="0"/>
                 <a:ea typeface="Calibri" pitchFamily="34" charset="-122"/>
@@ -5049,7 +4817,7 @@
             <a:r>
               <a:rPr lang="en-US" sz="1400" dirty="0">
                 <a:solidFill>
-                  <a:srgbClr val="E6EDF3"/>
+                  <a:srgbClr val="1F2937"/>
                 </a:solidFill>
                 <a:latin typeface="Calibri" pitchFamily="34" charset="0"/>
                 <a:ea typeface="Calibri" pitchFamily="34" charset="-122"/>
@@ -5088,7 +4856,7 @@
             <a:r>
               <a:rPr lang="en-US" sz="900" dirty="0">
                 <a:solidFill>
-                  <a:srgbClr val="94A3B8"/>
+                  <a:srgbClr val="64748B"/>
                 </a:solidFill>
                 <a:latin typeface="Calibri" pitchFamily="34" charset="0"/>
                 <a:ea typeface="Calibri" pitchFamily="34" charset="-122"/>
@@ -5100,38 +4868,9 @@
           </a:p>
         </p:txBody>
       </p:sp>
-      <p:sp>
-        <p:nvSpPr>
-          <p:cNvPr id="8" name="Shape 5"/>
-          <p:cNvSpPr/>
-          <p:nvPr/>
-        </p:nvSpPr>
-        <p:spPr>
-          <a:xfrm>
-            <a:off x="7772400" y="4590288"/>
-            <a:ext cx="969264" cy="475488"/>
-          </a:xfrm>
-          <a:prstGeom prst="roundRect">
-            <a:avLst>
-              <a:gd name="adj" fmla="val 11538"/>
-            </a:avLst>
-          </a:prstGeom>
-          <a:solidFill>
-            <a:srgbClr val="FFFFFF"/>
-          </a:solidFill>
-          <a:ln/>
-          <a:effectLst>
-            <a:outerShdw sx="100000" sy="100000" kx="0" ky="0" algn="bl" rotWithShape="0" blurRad="101600" dist="38100" dir="5400000">
-              <a:srgbClr val="000000">
-                <a:alpha val="35000"/>
-              </a:srgbClr>
-            </a:outerShdw>
-          </a:effectLst>
-        </p:spPr>
-      </p:sp>
       <p:pic>
         <p:nvPicPr>
-          <p:cNvPr id="9" name="Image 1" descr="/Users/pop7/Library/CloudStorage/OneDrive-MonsterConnectCo.,Ltd/Lecture/KOSEN69 - software-security/slides/pptx/assets/logo-small.png">    </p:cNvPr>
+          <p:cNvPr id="8" name="Image 1" descr="/Users/pop7/Library/CloudStorage/OneDrive-MonsterConnectCo.,Ltd/Lecture/KOSEN69 - software-security/slides/pptx/assets/logo-small.png">    </p:cNvPr>
           <p:cNvPicPr>
             <a:picLocks noChangeAspect="1"/>
           </p:cNvPicPr>
@@ -5145,7 +4884,7 @@
         </p:blipFill>
         <p:spPr>
           <a:xfrm>
-            <a:off x="7872984" y="4681728"/>
+            <a:off x="7882128" y="4700016"/>
             <a:ext cx="768096" cy="356616"/>
           </a:xfrm>
           <a:prstGeom prst="rect">
@@ -5167,7 +4906,7 @@
     <p:bg>
       <p:bgPr>
         <a:solidFill>
-          <a:srgbClr val="0E1726"/>
+          <a:srgbClr val="FFFFFF"/>
         </a:solidFill>
       </p:bgPr>
     </p:bg>
@@ -5204,9 +4943,9 @@
           </a:solidFill>
           <a:ln/>
           <a:effectLst>
-            <a:outerShdw sx="100000" sy="100000" kx="0" ky="0" algn="bl" rotWithShape="0" blurRad="101600" dist="38100" dir="5400000">
+            <a:outerShdw sx="100000" sy="100000" kx="0" ky="0" algn="bl" rotWithShape="0" blurRad="76200" dist="25400" dir="5400000">
               <a:srgbClr val="000000">
-                <a:alpha val="35000"/>
+                <a:alpha val="12000"/>
               </a:srgbClr>
             </a:outerShdw>
           </a:effectLst>
@@ -5263,7 +5002,7 @@
             <a:r>
               <a:rPr lang="en-US" sz="2600" b="1" dirty="0">
                 <a:solidFill>
-                  <a:srgbClr val="E6EDF3"/>
+                  <a:srgbClr val="1F2937"/>
                 </a:solidFill>
                 <a:latin typeface="Arial" pitchFamily="34" charset="0"/>
                 <a:ea typeface="Arial" pitchFamily="34" charset="-122"/>
@@ -5296,7 +5035,7 @@
           </a:solidFill>
           <a:ln w="12700">
             <a:solidFill>
-              <a:srgbClr val="1E2B45"/>
+              <a:srgbClr val="E8EDF3"/>
             </a:solidFill>
             <a:prstDash val="solid"/>
           </a:ln>
@@ -5375,13 +5114,13 @@
             </a:avLst>
           </a:prstGeom>
           <a:solidFill>
-            <a:srgbClr val="18243A"/>
+            <a:srgbClr val="F1F5F9"/>
           </a:solidFill>
           <a:ln/>
           <a:effectLst>
-            <a:outerShdw sx="100000" sy="100000" kx="0" ky="0" algn="bl" rotWithShape="0" blurRad="101600" dist="38100" dir="5400000">
+            <a:outerShdw sx="100000" sy="100000" kx="0" ky="0" algn="bl" rotWithShape="0" blurRad="76200" dist="25400" dir="5400000">
               <a:srgbClr val="000000">
-                <a:alpha val="35000"/>
+                <a:alpha val="12000"/>
               </a:srgbClr>
             </a:outerShdw>
           </a:effectLst>
@@ -5418,7 +5157,7 @@
             <a:r>
               <a:rPr lang="en-US" sz="1400" dirty="0">
                 <a:solidFill>
-                  <a:srgbClr val="E6EDF3"/>
+                  <a:srgbClr val="1F2937"/>
                 </a:solidFill>
                 <a:latin typeface="Calibri" pitchFamily="34" charset="0"/>
                 <a:ea typeface="Calibri" pitchFamily="34" charset="-122"/>
@@ -5439,7 +5178,7 @@
             <a:r>
               <a:rPr lang="en-US" sz="1400" dirty="0">
                 <a:solidFill>
-                  <a:srgbClr val="E6EDF3"/>
+                  <a:srgbClr val="1F2937"/>
                 </a:solidFill>
                 <a:latin typeface="Calibri" pitchFamily="34" charset="0"/>
                 <a:ea typeface="Calibri" pitchFamily="34" charset="-122"/>
@@ -5478,7 +5217,7 @@
             <a:r>
               <a:rPr lang="en-US" sz="900" dirty="0">
                 <a:solidFill>
-                  <a:srgbClr val="94A3B8"/>
+                  <a:srgbClr val="64748B"/>
                 </a:solidFill>
                 <a:latin typeface="Calibri" pitchFamily="34" charset="0"/>
                 <a:ea typeface="Calibri" pitchFamily="34" charset="-122"/>
@@ -5490,38 +5229,9 @@
           </a:p>
         </p:txBody>
       </p:sp>
-      <p:sp>
-        <p:nvSpPr>
-          <p:cNvPr id="10" name="Shape 7"/>
-          <p:cNvSpPr/>
-          <p:nvPr/>
-        </p:nvSpPr>
-        <p:spPr>
-          <a:xfrm>
-            <a:off x="7772400" y="4590288"/>
-            <a:ext cx="969264" cy="475488"/>
-          </a:xfrm>
-          <a:prstGeom prst="roundRect">
-            <a:avLst>
-              <a:gd name="adj" fmla="val 11538"/>
-            </a:avLst>
-          </a:prstGeom>
-          <a:solidFill>
-            <a:srgbClr val="FFFFFF"/>
-          </a:solidFill>
-          <a:ln/>
-          <a:effectLst>
-            <a:outerShdw sx="100000" sy="100000" kx="0" ky="0" algn="bl" rotWithShape="0" blurRad="101600" dist="38100" dir="5400000">
-              <a:srgbClr val="000000">
-                <a:alpha val="35000"/>
-              </a:srgbClr>
-            </a:outerShdw>
-          </a:effectLst>
-        </p:spPr>
-      </p:sp>
       <p:pic>
         <p:nvPicPr>
-          <p:cNvPr id="11" name="Image 1" descr="/Users/pop7/Library/CloudStorage/OneDrive-MonsterConnectCo.,Ltd/Lecture/KOSEN69 - software-security/slides/pptx/assets/logo-small.png">    </p:cNvPr>
+          <p:cNvPr id="10" name="Image 1" descr="/Users/pop7/Library/CloudStorage/OneDrive-MonsterConnectCo.,Ltd/Lecture/KOSEN69 - software-security/slides/pptx/assets/logo-small.png">    </p:cNvPr>
           <p:cNvPicPr>
             <a:picLocks noChangeAspect="1"/>
           </p:cNvPicPr>
@@ -5535,7 +5245,7 @@
         </p:blipFill>
         <p:spPr>
           <a:xfrm>
-            <a:off x="7872984" y="4681728"/>
+            <a:off x="7882128" y="4700016"/>
             <a:ext cx="768096" cy="356616"/>
           </a:xfrm>
           <a:prstGeom prst="rect">
@@ -5557,7 +5267,7 @@
     <p:bg>
       <p:bgPr>
         <a:solidFill>
-          <a:srgbClr val="0E1726"/>
+          <a:srgbClr val="FFFFFF"/>
         </a:solidFill>
       </p:bgPr>
     </p:bg>
@@ -5594,9 +5304,9 @@
           </a:solidFill>
           <a:ln/>
           <a:effectLst>
-            <a:outerShdw sx="100000" sy="100000" kx="0" ky="0" algn="bl" rotWithShape="0" blurRad="101600" dist="38100" dir="5400000">
+            <a:outerShdw sx="100000" sy="100000" kx="0" ky="0" algn="bl" rotWithShape="0" blurRad="76200" dist="25400" dir="5400000">
               <a:srgbClr val="000000">
-                <a:alpha val="35000"/>
+                <a:alpha val="12000"/>
               </a:srgbClr>
             </a:outerShdw>
           </a:effectLst>
@@ -5653,7 +5363,7 @@
             <a:r>
               <a:rPr lang="en-US" sz="2600" b="1" dirty="0">
                 <a:solidFill>
-                  <a:srgbClr val="E6EDF3"/>
+                  <a:srgbClr val="1F2937"/>
                 </a:solidFill>
                 <a:latin typeface="Arial" pitchFamily="34" charset="0"/>
                 <a:ea typeface="Arial" pitchFamily="34" charset="-122"/>
@@ -5686,7 +5396,7 @@
           </a:solidFill>
           <a:ln w="12700">
             <a:solidFill>
-              <a:srgbClr val="1E2B45"/>
+              <a:srgbClr val="E8EDF3"/>
             </a:solidFill>
             <a:prstDash val="solid"/>
           </a:ln>
@@ -5748,13 +5458,13 @@
             </a:avLst>
           </a:prstGeom>
           <a:solidFill>
-            <a:srgbClr val="18243A"/>
+            <a:srgbClr val="F1F5F9"/>
           </a:solidFill>
           <a:ln/>
           <a:effectLst>
-            <a:outerShdw sx="100000" sy="100000" kx="0" ky="0" algn="bl" rotWithShape="0" blurRad="101600" dist="38100" dir="5400000">
+            <a:outerShdw sx="100000" sy="100000" kx="0" ky="0" algn="bl" rotWithShape="0" blurRad="76200" dist="25400" dir="5400000">
               <a:srgbClr val="000000">
-                <a:alpha val="35000"/>
+                <a:alpha val="12000"/>
               </a:srgbClr>
             </a:outerShdw>
           </a:effectLst>
@@ -5791,7 +5501,7 @@
             <a:r>
               <a:rPr lang="en-US" sz="1400" dirty="0">
                 <a:solidFill>
-                  <a:srgbClr val="E6EDF3"/>
+                  <a:srgbClr val="1F2937"/>
                 </a:solidFill>
                 <a:latin typeface="Calibri" pitchFamily="34" charset="0"/>
                 <a:ea typeface="Calibri" pitchFamily="34" charset="-122"/>
@@ -5812,7 +5522,7 @@
             <a:r>
               <a:rPr lang="en-US" sz="1400" dirty="0">
                 <a:solidFill>
-                  <a:srgbClr val="E6EDF3"/>
+                  <a:srgbClr val="1F2937"/>
                 </a:solidFill>
                 <a:latin typeface="Calibri" pitchFamily="34" charset="0"/>
                 <a:ea typeface="Calibri" pitchFamily="34" charset="-122"/>
@@ -5851,7 +5561,7 @@
             <a:r>
               <a:rPr lang="en-US" sz="900" dirty="0">
                 <a:solidFill>
-                  <a:srgbClr val="94A3B8"/>
+                  <a:srgbClr val="64748B"/>
                 </a:solidFill>
                 <a:latin typeface="Calibri" pitchFamily="34" charset="0"/>
                 <a:ea typeface="Calibri" pitchFamily="34" charset="-122"/>
@@ -5863,38 +5573,9 @@
           </a:p>
         </p:txBody>
       </p:sp>
-      <p:sp>
-        <p:nvSpPr>
-          <p:cNvPr id="10" name="Shape 7"/>
-          <p:cNvSpPr/>
-          <p:nvPr/>
-        </p:nvSpPr>
-        <p:spPr>
-          <a:xfrm>
-            <a:off x="7772400" y="4590288"/>
-            <a:ext cx="969264" cy="475488"/>
-          </a:xfrm>
-          <a:prstGeom prst="roundRect">
-            <a:avLst>
-              <a:gd name="adj" fmla="val 11538"/>
-            </a:avLst>
-          </a:prstGeom>
-          <a:solidFill>
-            <a:srgbClr val="FFFFFF"/>
-          </a:solidFill>
-          <a:ln/>
-          <a:effectLst>
-            <a:outerShdw sx="100000" sy="100000" kx="0" ky="0" algn="bl" rotWithShape="0" blurRad="101600" dist="38100" dir="5400000">
-              <a:srgbClr val="000000">
-                <a:alpha val="35000"/>
-              </a:srgbClr>
-            </a:outerShdw>
-          </a:effectLst>
-        </p:spPr>
-      </p:sp>
       <p:pic>
         <p:nvPicPr>
-          <p:cNvPr id="11" name="Image 1" descr="/Users/pop7/Library/CloudStorage/OneDrive-MonsterConnectCo.,Ltd/Lecture/KOSEN69 - software-security/slides/pptx/assets/logo-small.png">    </p:cNvPr>
+          <p:cNvPr id="10" name="Image 1" descr="/Users/pop7/Library/CloudStorage/OneDrive-MonsterConnectCo.,Ltd/Lecture/KOSEN69 - software-security/slides/pptx/assets/logo-small.png">    </p:cNvPr>
           <p:cNvPicPr>
             <a:picLocks noChangeAspect="1"/>
           </p:cNvPicPr>
@@ -5908,7 +5589,7 @@
         </p:blipFill>
         <p:spPr>
           <a:xfrm>
-            <a:off x="7872984" y="4681728"/>
+            <a:off x="7882128" y="4700016"/>
             <a:ext cx="768096" cy="356616"/>
           </a:xfrm>
           <a:prstGeom prst="rect">
@@ -5930,7 +5611,7 @@
     <p:bg>
       <p:bgPr>
         <a:solidFill>
-          <a:srgbClr val="0E1726"/>
+          <a:srgbClr val="FFFFFF"/>
         </a:solidFill>
       </p:bgPr>
     </p:bg>
@@ -5967,9 +5648,9 @@
           </a:solidFill>
           <a:ln/>
           <a:effectLst>
-            <a:outerShdw sx="100000" sy="100000" kx="0" ky="0" algn="bl" rotWithShape="0" blurRad="101600" dist="38100" dir="5400000">
+            <a:outerShdw sx="100000" sy="100000" kx="0" ky="0" algn="bl" rotWithShape="0" blurRad="76200" dist="25400" dir="5400000">
               <a:srgbClr val="000000">
-                <a:alpha val="35000"/>
+                <a:alpha val="12000"/>
               </a:srgbClr>
             </a:outerShdw>
           </a:effectLst>
@@ -6026,7 +5707,7 @@
             <a:r>
               <a:rPr lang="en-US" sz="2600" b="1" dirty="0">
                 <a:solidFill>
-                  <a:srgbClr val="E6EDF3"/>
+                  <a:srgbClr val="1F2937"/>
                 </a:solidFill>
                 <a:latin typeface="Arial" pitchFamily="34" charset="0"/>
                 <a:ea typeface="Arial" pitchFamily="34" charset="-122"/>
@@ -6055,13 +5736,13 @@
             </a:avLst>
           </a:prstGeom>
           <a:solidFill>
-            <a:srgbClr val="18243A"/>
+            <a:srgbClr val="F1F5F9"/>
           </a:solidFill>
           <a:ln/>
           <a:effectLst>
-            <a:outerShdw sx="100000" sy="100000" kx="0" ky="0" algn="bl" rotWithShape="0" blurRad="101600" dist="38100" dir="5400000">
+            <a:outerShdw sx="100000" sy="100000" kx="0" ky="0" algn="bl" rotWithShape="0" blurRad="76200" dist="25400" dir="5400000">
               <a:srgbClr val="000000">
-                <a:alpha val="35000"/>
+                <a:alpha val="12000"/>
               </a:srgbClr>
             </a:outerShdw>
           </a:effectLst>
@@ -6098,7 +5779,7 @@
             <a:r>
               <a:rPr lang="en-US" sz="1400" dirty="0">
                 <a:solidFill>
-                  <a:srgbClr val="E6EDF3"/>
+                  <a:srgbClr val="1F2937"/>
                 </a:solidFill>
                 <a:latin typeface="Calibri" pitchFamily="34" charset="0"/>
                 <a:ea typeface="Calibri" pitchFamily="34" charset="-122"/>
@@ -6119,7 +5800,7 @@
             <a:r>
               <a:rPr lang="en-US" sz="1400" dirty="0">
                 <a:solidFill>
-                  <a:srgbClr val="E6EDF3"/>
+                  <a:srgbClr val="1F2937"/>
                 </a:solidFill>
                 <a:latin typeface="Calibri" pitchFamily="34" charset="0"/>
                 <a:ea typeface="Calibri" pitchFamily="34" charset="-122"/>
@@ -6140,7 +5821,7 @@
             <a:r>
               <a:rPr lang="en-US" sz="1400" dirty="0">
                 <a:solidFill>
-                  <a:srgbClr val="E6EDF3"/>
+                  <a:srgbClr val="1F2937"/>
                 </a:solidFill>
                 <a:latin typeface="Calibri" pitchFamily="34" charset="0"/>
                 <a:ea typeface="Calibri" pitchFamily="34" charset="-122"/>
@@ -6161,7 +5842,7 @@
             <a:r>
               <a:rPr lang="en-US" sz="1400" dirty="0">
                 <a:solidFill>
-                  <a:srgbClr val="E6EDF3"/>
+                  <a:srgbClr val="1F2937"/>
                 </a:solidFill>
                 <a:latin typeface="Calibri" pitchFamily="34" charset="0"/>
                 <a:ea typeface="Calibri" pitchFamily="34" charset="-122"/>
@@ -6200,7 +5881,7 @@
             <a:r>
               <a:rPr lang="en-US" sz="900" dirty="0">
                 <a:solidFill>
-                  <a:srgbClr val="94A3B8"/>
+                  <a:srgbClr val="64748B"/>
                 </a:solidFill>
                 <a:latin typeface="Calibri" pitchFamily="34" charset="0"/>
                 <a:ea typeface="Calibri" pitchFamily="34" charset="-122"/>
@@ -6212,38 +5893,9 @@
           </a:p>
         </p:txBody>
       </p:sp>
-      <p:sp>
-        <p:nvSpPr>
-          <p:cNvPr id="8" name="Shape 5"/>
-          <p:cNvSpPr/>
-          <p:nvPr/>
-        </p:nvSpPr>
-        <p:spPr>
-          <a:xfrm>
-            <a:off x="7772400" y="4590288"/>
-            <a:ext cx="969264" cy="475488"/>
-          </a:xfrm>
-          <a:prstGeom prst="roundRect">
-            <a:avLst>
-              <a:gd name="adj" fmla="val 11538"/>
-            </a:avLst>
-          </a:prstGeom>
-          <a:solidFill>
-            <a:srgbClr val="FFFFFF"/>
-          </a:solidFill>
-          <a:ln/>
-          <a:effectLst>
-            <a:outerShdw sx="100000" sy="100000" kx="0" ky="0" algn="bl" rotWithShape="0" blurRad="101600" dist="38100" dir="5400000">
-              <a:srgbClr val="000000">
-                <a:alpha val="35000"/>
-              </a:srgbClr>
-            </a:outerShdw>
-          </a:effectLst>
-        </p:spPr>
-      </p:sp>
       <p:pic>
         <p:nvPicPr>
-          <p:cNvPr id="9" name="Image 1" descr="/Users/pop7/Library/CloudStorage/OneDrive-MonsterConnectCo.,Ltd/Lecture/KOSEN69 - software-security/slides/pptx/assets/logo-small.png">    </p:cNvPr>
+          <p:cNvPr id="8" name="Image 1" descr="/Users/pop7/Library/CloudStorage/OneDrive-MonsterConnectCo.,Ltd/Lecture/KOSEN69 - software-security/slides/pptx/assets/logo-small.png">    </p:cNvPr>
           <p:cNvPicPr>
             <a:picLocks noChangeAspect="1"/>
           </p:cNvPicPr>
@@ -6257,7 +5909,7 @@
         </p:blipFill>
         <p:spPr>
           <a:xfrm>
-            <a:off x="7872984" y="4681728"/>
+            <a:off x="7882128" y="4700016"/>
             <a:ext cx="768096" cy="356616"/>
           </a:xfrm>
           <a:prstGeom prst="rect">
@@ -6279,7 +5931,7 @@
     <p:bg>
       <p:bgPr>
         <a:solidFill>
-          <a:srgbClr val="0E1726"/>
+          <a:srgbClr val="FFFFFF"/>
         </a:solidFill>
       </p:bgPr>
     </p:bg>
@@ -6316,9 +5968,9 @@
           </a:solidFill>
           <a:ln/>
           <a:effectLst>
-            <a:outerShdw sx="100000" sy="100000" kx="0" ky="0" algn="bl" rotWithShape="0" blurRad="101600" dist="38100" dir="5400000">
+            <a:outerShdw sx="100000" sy="100000" kx="0" ky="0" algn="bl" rotWithShape="0" blurRad="76200" dist="25400" dir="5400000">
               <a:srgbClr val="000000">
-                <a:alpha val="35000"/>
+                <a:alpha val="12000"/>
               </a:srgbClr>
             </a:outerShdw>
           </a:effectLst>
@@ -6375,7 +6027,7 @@
             <a:r>
               <a:rPr lang="en-US" sz="2600" b="1" dirty="0">
                 <a:solidFill>
-                  <a:srgbClr val="E6EDF3"/>
+                  <a:srgbClr val="1F2937"/>
                 </a:solidFill>
                 <a:latin typeface="Arial" pitchFamily="34" charset="0"/>
                 <a:ea typeface="Arial" pitchFamily="34" charset="-122"/>
@@ -6404,13 +6056,13 @@
             </a:avLst>
           </a:prstGeom>
           <a:solidFill>
-            <a:srgbClr val="18243A"/>
+            <a:srgbClr val="F1F5F9"/>
           </a:solidFill>
           <a:ln/>
           <a:effectLst>
-            <a:outerShdw sx="100000" sy="100000" kx="0" ky="0" algn="bl" rotWithShape="0" blurRad="101600" dist="38100" dir="5400000">
+            <a:outerShdw sx="100000" sy="100000" kx="0" ky="0" algn="bl" rotWithShape="0" blurRad="76200" dist="25400" dir="5400000">
               <a:srgbClr val="000000">
-                <a:alpha val="35000"/>
+                <a:alpha val="12000"/>
               </a:srgbClr>
             </a:outerShdw>
           </a:effectLst>
@@ -6447,7 +6099,7 @@
             <a:r>
               <a:rPr lang="en-US" sz="1400" dirty="0">
                 <a:solidFill>
-                  <a:srgbClr val="E6EDF3"/>
+                  <a:srgbClr val="1F2937"/>
                 </a:solidFill>
                 <a:latin typeface="Calibri" pitchFamily="34" charset="0"/>
                 <a:ea typeface="Calibri" pitchFamily="34" charset="-122"/>
@@ -6468,7 +6120,7 @@
             <a:r>
               <a:rPr lang="en-US" sz="1400" dirty="0">
                 <a:solidFill>
-                  <a:srgbClr val="E6EDF3"/>
+                  <a:srgbClr val="1F2937"/>
                 </a:solidFill>
                 <a:latin typeface="Calibri" pitchFamily="34" charset="0"/>
                 <a:ea typeface="Calibri" pitchFamily="34" charset="-122"/>
@@ -6489,7 +6141,7 @@
             <a:r>
               <a:rPr lang="en-US" sz="1400" dirty="0">
                 <a:solidFill>
-                  <a:srgbClr val="E6EDF3"/>
+                  <a:srgbClr val="1F2937"/>
                 </a:solidFill>
                 <a:latin typeface="Calibri" pitchFamily="34" charset="0"/>
                 <a:ea typeface="Calibri" pitchFamily="34" charset="-122"/>
@@ -6510,7 +6162,7 @@
             <a:r>
               <a:rPr lang="en-US" sz="1400" dirty="0">
                 <a:solidFill>
-                  <a:srgbClr val="E6EDF3"/>
+                  <a:srgbClr val="1F2937"/>
                 </a:solidFill>
                 <a:latin typeface="Calibri" pitchFamily="34" charset="0"/>
                 <a:ea typeface="Calibri" pitchFamily="34" charset="-122"/>
@@ -6531,7 +6183,7 @@
             <a:r>
               <a:rPr lang="en-US" sz="1400" dirty="0">
                 <a:solidFill>
-                  <a:srgbClr val="E6EDF3"/>
+                  <a:srgbClr val="1F2937"/>
                 </a:solidFill>
                 <a:latin typeface="Calibri" pitchFamily="34" charset="0"/>
                 <a:ea typeface="Calibri" pitchFamily="34" charset="-122"/>
@@ -6570,7 +6222,7 @@
             <a:r>
               <a:rPr lang="en-US" sz="900" dirty="0">
                 <a:solidFill>
-                  <a:srgbClr val="94A3B8"/>
+                  <a:srgbClr val="64748B"/>
                 </a:solidFill>
                 <a:latin typeface="Calibri" pitchFamily="34" charset="0"/>
                 <a:ea typeface="Calibri" pitchFamily="34" charset="-122"/>
@@ -6582,38 +6234,9 @@
           </a:p>
         </p:txBody>
       </p:sp>
-      <p:sp>
-        <p:nvSpPr>
-          <p:cNvPr id="8" name="Shape 5"/>
-          <p:cNvSpPr/>
-          <p:nvPr/>
-        </p:nvSpPr>
-        <p:spPr>
-          <a:xfrm>
-            <a:off x="7772400" y="4590288"/>
-            <a:ext cx="969264" cy="475488"/>
-          </a:xfrm>
-          <a:prstGeom prst="roundRect">
-            <a:avLst>
-              <a:gd name="adj" fmla="val 11538"/>
-            </a:avLst>
-          </a:prstGeom>
-          <a:solidFill>
-            <a:srgbClr val="FFFFFF"/>
-          </a:solidFill>
-          <a:ln/>
-          <a:effectLst>
-            <a:outerShdw sx="100000" sy="100000" kx="0" ky="0" algn="bl" rotWithShape="0" blurRad="101600" dist="38100" dir="5400000">
-              <a:srgbClr val="000000">
-                <a:alpha val="35000"/>
-              </a:srgbClr>
-            </a:outerShdw>
-          </a:effectLst>
-        </p:spPr>
-      </p:sp>
       <p:pic>
         <p:nvPicPr>
-          <p:cNvPr id="9" name="Image 1" descr="/Users/pop7/Library/CloudStorage/OneDrive-MonsterConnectCo.,Ltd/Lecture/KOSEN69 - software-security/slides/pptx/assets/logo-small.png">    </p:cNvPr>
+          <p:cNvPr id="8" name="Image 1" descr="/Users/pop7/Library/CloudStorage/OneDrive-MonsterConnectCo.,Ltd/Lecture/KOSEN69 - software-security/slides/pptx/assets/logo-small.png">    </p:cNvPr>
           <p:cNvPicPr>
             <a:picLocks noChangeAspect="1"/>
           </p:cNvPicPr>
@@ -6627,7 +6250,7 @@
         </p:blipFill>
         <p:spPr>
           <a:xfrm>
-            <a:off x="7872984" y="4681728"/>
+            <a:off x="7882128" y="4700016"/>
             <a:ext cx="768096" cy="356616"/>
           </a:xfrm>
           <a:prstGeom prst="rect">
@@ -6649,7 +6272,7 @@
     <p:bg>
       <p:bgPr>
         <a:solidFill>
-          <a:srgbClr val="0E1726"/>
+          <a:srgbClr val="FFFFFF"/>
         </a:solidFill>
       </p:bgPr>
     </p:bg>
@@ -6686,9 +6309,9 @@
           </a:solidFill>
           <a:ln/>
           <a:effectLst>
-            <a:outerShdw sx="100000" sy="100000" kx="0" ky="0" algn="bl" rotWithShape="0" blurRad="101600" dist="38100" dir="5400000">
+            <a:outerShdw sx="100000" sy="100000" kx="0" ky="0" algn="bl" rotWithShape="0" blurRad="76200" dist="25400" dir="5400000">
               <a:srgbClr val="000000">
-                <a:alpha val="35000"/>
+                <a:alpha val="12000"/>
               </a:srgbClr>
             </a:outerShdw>
           </a:effectLst>
@@ -6745,7 +6368,7 @@
             <a:r>
               <a:rPr lang="en-US" sz="2600" b="1" dirty="0">
                 <a:solidFill>
-                  <a:srgbClr val="E6EDF3"/>
+                  <a:srgbClr val="1F2937"/>
                 </a:solidFill>
                 <a:latin typeface="Arial" pitchFamily="34" charset="0"/>
                 <a:ea typeface="Arial" pitchFamily="34" charset="-122"/>
@@ -6784,7 +6407,7 @@
             <a:r>
               <a:rPr lang="en-US" sz="1400" dirty="0">
                 <a:solidFill>
-                  <a:srgbClr val="E6EDF3"/>
+                  <a:srgbClr val="1F2937"/>
                 </a:solidFill>
                 <a:latin typeface="Calibri" pitchFamily="34" charset="0"/>
                 <a:ea typeface="Calibri" pitchFamily="34" charset="-122"/>
@@ -6817,7 +6440,7 @@
           </a:solidFill>
           <a:ln w="12700">
             <a:solidFill>
-              <a:srgbClr val="1E2B45"/>
+              <a:srgbClr val="E8EDF3"/>
             </a:solidFill>
             <a:prstDash val="solid"/>
           </a:ln>
@@ -6974,7 +6597,7 @@
             <a:r>
               <a:rPr lang="en-US" sz="900" dirty="0">
                 <a:solidFill>
-                  <a:srgbClr val="94A3B8"/>
+                  <a:srgbClr val="64748B"/>
                 </a:solidFill>
                 <a:latin typeface="Calibri" pitchFamily="34" charset="0"/>
                 <a:ea typeface="Calibri" pitchFamily="34" charset="-122"/>
@@ -6986,38 +6609,9 @@
           </a:p>
         </p:txBody>
       </p:sp>
-      <p:sp>
-        <p:nvSpPr>
-          <p:cNvPr id="9" name="Shape 6"/>
-          <p:cNvSpPr/>
-          <p:nvPr/>
-        </p:nvSpPr>
-        <p:spPr>
-          <a:xfrm>
-            <a:off x="7772400" y="4590288"/>
-            <a:ext cx="969264" cy="475488"/>
-          </a:xfrm>
-          <a:prstGeom prst="roundRect">
-            <a:avLst>
-              <a:gd name="adj" fmla="val 11538"/>
-            </a:avLst>
-          </a:prstGeom>
-          <a:solidFill>
-            <a:srgbClr val="FFFFFF"/>
-          </a:solidFill>
-          <a:ln/>
-          <a:effectLst>
-            <a:outerShdw sx="100000" sy="100000" kx="0" ky="0" algn="bl" rotWithShape="0" blurRad="101600" dist="38100" dir="5400000">
-              <a:srgbClr val="000000">
-                <a:alpha val="35000"/>
-              </a:srgbClr>
-            </a:outerShdw>
-          </a:effectLst>
-        </p:spPr>
-      </p:sp>
       <p:pic>
         <p:nvPicPr>
-          <p:cNvPr id="10" name="Image 1" descr="/Users/pop7/Library/CloudStorage/OneDrive-MonsterConnectCo.,Ltd/Lecture/KOSEN69 - software-security/slides/pptx/assets/logo-small.png">    </p:cNvPr>
+          <p:cNvPr id="9" name="Image 1" descr="/Users/pop7/Library/CloudStorage/OneDrive-MonsterConnectCo.,Ltd/Lecture/KOSEN69 - software-security/slides/pptx/assets/logo-small.png">    </p:cNvPr>
           <p:cNvPicPr>
             <a:picLocks noChangeAspect="1"/>
           </p:cNvPicPr>
@@ -7031,7 +6625,7 @@
         </p:blipFill>
         <p:spPr>
           <a:xfrm>
-            <a:off x="7872984" y="4681728"/>
+            <a:off x="7882128" y="4700016"/>
             <a:ext cx="768096" cy="356616"/>
           </a:xfrm>
           <a:prstGeom prst="rect">

--- a/slides/pptx/week10.pptx
+++ b/slides/pptx/week10.pptx
@@ -515,7 +515,7 @@
           <a:p>
             <a:r>
               <a:rPr lang="en-US" dirty="0"/>
-              <a:t/>
+              <a:t>Welcome back after midterm. Hook: change one number in an API URL and read a stranger's car location — that's the #1 API bug, and it's everywhere. Today: the OWASP API Top 10, hands-on. ~2 min.</a:t>
             </a:r>
             <a:endParaRPr lang="en-US" dirty="0"/>
           </a:p>
@@ -603,7 +603,7 @@
           <a:p>
             <a:r>
               <a:rPr lang="en-US" dirty="0"/>
-              <a:t/>
+              <a:t>Shows that "a feature" + missing authz = RCE. A legit admin editor, abused once an attacker has access. Ties to least-privilege: even admins shouldn't be able to inject executable code. ~3 min.</a:t>
             </a:r>
             <a:endParaRPr lang="en-US" dirty="0"/>
           </a:p>
@@ -691,7 +691,7 @@
           <a:p>
             <a:r>
               <a:rPr lang="en-US" dirty="0"/>
-              <a:t/>
+              <a:t>Explain before lab. crAPI is OWASP's intentionally vulnerable API. Round 2 (fix) is graded. Note crAPI is heavier (compose stack) — start the pull early. Q6 of the quiz asks for the mass-assignment field + fix + flag. ~3 min.</a:t>
             </a:r>
             <a:endParaRPr lang="en-US" dirty="0"/>
           </a:p>
@@ -779,7 +779,7 @@
           <a:p>
             <a:r>
               <a:rPr lang="en-US" dirty="0"/>
-              <a:t/>
+              <a:t>Before/after + API-Top-10 mapping. AI-resilient tasks count. Also the NoteVault project API task.</a:t>
             </a:r>
             <a:endParaRPr lang="en-US" dirty="0"/>
           </a:p>
@@ -867,7 +867,7 @@
           <a:p>
             <a:r>
               <a:rPr lang="en-US" dirty="0"/>
-              <a:t/>
+              <a:t>Recap. Cold-call: "what one check stops BOLA?" (per-object ownership authorization). ~2 min.</a:t>
             </a:r>
             <a:endParaRPr lang="en-US" dirty="0"/>
           </a:p>
@@ -955,7 +955,7 @@
           <a:p>
             <a:r>
               <a:rPr lang="en-US" dirty="0"/>
-              <a:t/>
+              <a:t>Cliffhanger: "Next week we leave the web — crash a C binary with a fuzzer and hijack its execution, then rewrite it in Rust." Remind crAPI pulled before next session.</a:t>
             </a:r>
             <a:endParaRPr lang="en-US" dirty="0"/>
           </a:p>
@@ -1043,7 +1043,7 @@
           <a:p>
             <a:r>
               <a:rPr lang="en-US" dirty="0"/>
-              <a:t/>
+              <a:t>Roadmap, 1 min. Frame: APIs are where the web bugs (IDOR, injection) reappear without a browser to hide behind. Lab = raid the deliberately vulnerable crAPI app, then fix it.</a:t>
             </a:r>
             <a:endParaRPr lang="en-US" dirty="0"/>
           </a:p>
@@ -1131,7 +1131,7 @@
           <a:p>
             <a:r>
               <a:rPr lang="en-US" dirty="0"/>
-              <a:t/>
+              <a:t>1-min bridge from the web unit. The midterm tested W1-6; APIs reuse all of it. Ask: "what was IDOR?" — because BOLA (the #1 API risk) is literally IDOR at API scale.</a:t>
             </a:r>
             <a:endParaRPr lang="en-US" dirty="0"/>
           </a:p>
@@ -1219,7 +1219,7 @@
           <a:p>
             <a:r>
               <a:rPr lang="en-US" dirty="0"/>
-              <a:t/>
+              <a:t>Key framing. No browser = no SameSite/CSP safety net; the API is the raw attack surface. APIs expose object ids by design (REST). Mobile/SPA clients are fully attacker-controlled — never trust what they send. ~5 min.</a:t>
             </a:r>
             <a:endParaRPr lang="en-US" dirty="0"/>
           </a:p>
@@ -1307,7 +1307,7 @@
           <a:p>
             <a:r>
               <a:rPr lang="en-US" dirty="0"/>
-              <a:t/>
+              <a:t>The worked example — this is the crAPI BOLA challenge. Same root cause as W6 IDOR: authenticated, but no per-object ownership check. Ask: "the server knows who I am — why does it still leak 1002?" (it never checks the object belongs to me). ~6 min.</a:t>
             </a:r>
             <a:endParaRPr lang="en-US" dirty="0"/>
           </a:p>
@@ -1395,7 +1395,7 @@
           <a:p>
             <a:r>
               <a:rPr lang="en-US" dirty="0"/>
-              <a:t/>
+              <a:t>Walk it: the server takes the JSON and binds every field to the model, including ones the UI never exposes (role, credit, is_verified). This is the crAPI mass-assignment challenge and the weekly quiz Q6. Fix = allow-list the bindable fields. ~5 min.</a:t>
             </a:r>
             <a:endParaRPr lang="en-US" dirty="0"/>
           </a:p>
@@ -1483,7 +1483,7 @@
           <a:p>
             <a:r>
               <a:rPr lang="en-US" dirty="0"/>
-              <a:t/>
+              <a:t>Round out the list. API4 = no rate limit → brute force / cost blowup. Excessive data exposure = API returns the whole user object and the UI just hides fields — attacker reads the raw JSON. ~4 min.</a:t>
             </a:r>
             <a:endParaRPr lang="en-US" dirty="0"/>
           </a:p>
@@ -1571,7 +1571,7 @@
           <a:p>
             <a:r>
               <a:rPr lang="en-US" dirty="0"/>
-              <a:t/>
+              <a:t>The payoff. #1: ownership check on every object access (kills BOLA). DTO/allow-list binding kills mass assignment AND excessive exposure in one move. Schema validation at the edge rejects junk early. ~5 min.</a:t>
             </a:r>
             <a:endParaRPr lang="en-US" dirty="0"/>
           </a:p>
@@ -1659,7 +1659,7 @@
           <a:p>
             <a:r>
               <a:rPr lang="en-US" dirty="0"/>
-              <a:t/>
+              <a:t>Practical recon for the CTF/midterm-style tasks: enumerate before you exploit. Emphasize ethics + scope: only against provided sandbox targets. This is the "map the attack surface" muscle from W1, applied live. ~4 min.</a:t>
             </a:r>
             <a:endParaRPr lang="en-US" dirty="0"/>
           </a:p>
@@ -3352,11 +3352,11 @@
         <p:spPr>
           <a:xfrm>
             <a:off x="457200" y="1325880"/>
-            <a:ext cx="8229600" cy="1207008"/>
+            <a:ext cx="8229600" cy="1517904"/>
           </a:xfrm>
           <a:prstGeom prst="roundRect">
             <a:avLst>
-              <a:gd name="adj" fmla="val 6061"/>
+              <a:gd name="adj" fmla="val 4819"/>
             </a:avLst>
           </a:prstGeom>
           <a:solidFill>
@@ -3381,7 +3381,7 @@
         <p:spPr>
           <a:xfrm>
             <a:off x="731520" y="1435608"/>
-            <a:ext cx="7680960" cy="987552"/>
+            <a:ext cx="7680960" cy="1298448"/>
           </a:xfrm>
           <a:prstGeom prst="rect">
             <a:avLst/>
@@ -3452,6 +3452,27 @@
                 <a:cs typeface="Calibri" pitchFamily="34" charset="-120"/>
               </a:rPr>
               <a:t>Proof exploits now fail</a:t>
+            </a:r>
+            <a:endParaRPr lang="en-US" sz="1400" dirty="0"/>
+          </a:p>
+          <a:p>
+            <a:pPr marL="342900" indent="-342900">
+              <a:spcAft>
+                <a:spcPts val="600"/>
+              </a:spcAft>
+              <a:buSzPct val="100000"/>
+              <a:buChar char="•"/>
+            </a:pPr>
+            <a:r>
+              <a:rPr lang="en-US" sz="1400" dirty="0">
+                <a:solidFill>
+                  <a:srgbClr val="1F2937"/>
+                </a:solidFill>
+                <a:latin typeface="Calibri" pitchFamily="34" charset="0"/>
+                <a:ea typeface="Calibri" pitchFamily="34" charset="-122"/>
+                <a:cs typeface="Calibri" pitchFamily="34" charset="-120"/>
+              </a:rPr>
+              <a:t>+ Audit the AI / EiPE / Prompt Problem (see worksheet)</a:t>
             </a:r>
             <a:endParaRPr lang="en-US" sz="1400" dirty="0"/>
           </a:p>

--- a/slides/pptx/week10.pptx
+++ b/slides/pptx/week10.pptx
@@ -3352,6 +3352,67 @@
         <p:spPr>
           <a:xfrm>
             <a:off x="457200" y="1325880"/>
+            <a:ext cx="8229600" cy="822960"/>
+          </a:xfrm>
+          <a:prstGeom prst="roundRect">
+            <a:avLst>
+              <a:gd name="adj" fmla="val 8889"/>
+            </a:avLst>
+          </a:prstGeom>
+          <a:solidFill>
+            <a:srgbClr val="E8EDF3"/>
+          </a:solidFill>
+          <a:ln/>
+        </p:spPr>
+      </p:sp>
+      <p:sp>
+        <p:nvSpPr>
+          <p:cNvPr id="6" name="Text 3"/>
+          <p:cNvSpPr/>
+          <p:nvPr/>
+        </p:nvSpPr>
+        <p:spPr>
+          <a:xfrm>
+            <a:off x="731520" y="1325880"/>
+            <a:ext cx="7680960" cy="822960"/>
+          </a:xfrm>
+          <a:prstGeom prst="rect">
+            <a:avLst/>
+          </a:prstGeom>
+          <a:noFill/>
+          <a:ln/>
+        </p:spPr>
+        <p:txBody>
+          <a:bodyPr wrap="square" lIns="0" tIns="0" rIns="0" bIns="0" rtlCol="0" anchor="ctr"/>
+          <a:lstStyle/>
+          <a:p>
+            <a:pPr indent="0" marL="0">
+              <a:buNone/>
+            </a:pPr>
+            <a:r>
+              <a:rPr lang="en-US" sz="1400" i="1" dirty="0">
+                <a:solidFill>
+                  <a:srgbClr val="E35205"/>
+                </a:solidFill>
+                <a:latin typeface="Calibri" pitchFamily="34" charset="0"/>
+                <a:ea typeface="Calibri" pitchFamily="34" charset="-122"/>
+                <a:cs typeface="Calibri" pitchFamily="34" charset="-120"/>
+              </a:rPr>
+              <a:t>📋 Worksheet 10 — labs/week10-api-security/worksheet.md (Part 3) · kickoff: docker compose up → :5000 (insecure) / :5001 (secure)</a:t>
+            </a:r>
+            <a:endParaRPr lang="en-US" sz="1400" dirty="0"/>
+          </a:p>
+        </p:txBody>
+      </p:sp>
+      <p:sp>
+        <p:nvSpPr>
+          <p:cNvPr id="7" name="Shape 4"/>
+          <p:cNvSpPr/>
+          <p:nvPr/>
+        </p:nvSpPr>
+        <p:spPr>
+          <a:xfrm>
+            <a:off x="457200" y="2313432"/>
             <a:ext cx="8229600" cy="1517904"/>
           </a:xfrm>
           <a:prstGeom prst="roundRect">
@@ -3374,13 +3435,13 @@
       </p:sp>
       <p:sp>
         <p:nvSpPr>
-          <p:cNvPr id="6" name="Text 3"/>
-          <p:cNvSpPr/>
-          <p:nvPr/>
-        </p:nvSpPr>
-        <p:spPr>
-          <a:xfrm>
-            <a:off x="731520" y="1435608"/>
+          <p:cNvPr id="8" name="Text 5"/>
+          <p:cNvSpPr/>
+          <p:nvPr/>
+        </p:nvSpPr>
+        <p:spPr>
+          <a:xfrm>
+            <a:off x="731520" y="2423160"/>
             <a:ext cx="7680960" cy="1298448"/>
           </a:xfrm>
           <a:prstGeom prst="rect">
@@ -3480,7 +3541,7 @@
       </p:sp>
       <p:sp>
         <p:nvSpPr>
-          <p:cNvPr id="7" name="Text 4"/>
+          <p:cNvPr id="9" name="Text 6"/>
           <p:cNvSpPr/>
           <p:nvPr/>
         </p:nvSpPr>
@@ -3519,7 +3580,7 @@
       </p:sp>
       <p:pic>
         <p:nvPicPr>
-          <p:cNvPr id="8" name="Image 1" descr="/Users/pop7/Library/CloudStorage/OneDrive-MonsterConnectCo.,Ltd/Lecture/KOSEN69 - software-security/slides/pptx/assets/logo-small.png">    </p:cNvPr>
+          <p:cNvPr id="10" name="Image 1" descr="/Users/pop7/Library/CloudStorage/OneDrive-MonsterConnectCo.,Ltd/Lecture/KOSEN69 - software-security/slides/pptx/assets/logo-small.png">    </p:cNvPr>
           <p:cNvPicPr>
             <a:picLocks noChangeAspect="1"/>
           </p:cNvPicPr>

--- a/slides/pptx/week10.pptx
+++ b/slides/pptx/week10.pptx
@@ -3398,7 +3398,7 @@
                 <a:ea typeface="Calibri" pitchFamily="34" charset="-122"/>
                 <a:cs typeface="Calibri" pitchFamily="34" charset="-120"/>
               </a:rPr>
-              <a:t>📋 Worksheet 10 — labs/week10-api-security/worksheet.md (Part 3) · kickoff: docker compose up → :5000 (insecure) / :5001 (secure)</a:t>
+              <a:t>📋 Worksheet 10 — labs/week10-api-security/worksheet.md (Part 3) · kickoff: docker compose up → :8080 (insecure) / :8081 (secure)</a:t>
             </a:r>
             <a:endParaRPr lang="en-US" sz="1400" dirty="0"/>
           </a:p>
